--- a/public/background.pptx
+++ b/public/background.pptx
@@ -110,7 +110,7 @@
   <p:extLst>
     <p:ext uri="{EFAFB233-063F-42B5-8137-9DF3F51BA10A}">
       <p15:sldGuideLst xmlns:p15="http://schemas.microsoft.com/office/powerpoint/2012/main">
-        <p15:guide id="1" orient="horz" pos="1820" userDrawn="1">
+        <p15:guide id="1" orient="horz" pos="1797" userDrawn="1">
           <p15:clr>
             <a:srgbClr val="A4A3A4"/>
           </p15:clr>
@@ -208,7 +208,7 @@
           <a:p>
             <a:fld id="{B29A3AEA-883C-4209-8788-4654B9BFA89D}" type="datetimeFigureOut">
               <a:rPr lang="pt-BR" smtClean="0"/>
-              <a:t>07/10/2025</a:t>
+              <a:t>29/06/2026</a:t>
             </a:fld>
             <a:endParaRPr lang="pt-BR"/>
           </a:p>
@@ -622,7 +622,7 @@
           <a:p>
             <a:fld id="{8DE7C5F4-3E42-4694-80D2-BC3004364726}" type="datetimeFigureOut">
               <a:rPr lang="pt-BR" smtClean="0"/>
-              <a:t>07/10/2025</a:t>
+              <a:t>29/06/2026</a:t>
             </a:fld>
             <a:endParaRPr lang="pt-BR"/>
           </a:p>
@@ -820,7 +820,7 @@
           <a:p>
             <a:fld id="{8DE7C5F4-3E42-4694-80D2-BC3004364726}" type="datetimeFigureOut">
               <a:rPr lang="pt-BR" smtClean="0"/>
-              <a:t>07/10/2025</a:t>
+              <a:t>29/06/2026</a:t>
             </a:fld>
             <a:endParaRPr lang="pt-BR"/>
           </a:p>
@@ -1028,7 +1028,7 @@
           <a:p>
             <a:fld id="{8DE7C5F4-3E42-4694-80D2-BC3004364726}" type="datetimeFigureOut">
               <a:rPr lang="pt-BR" smtClean="0"/>
-              <a:t>07/10/2025</a:t>
+              <a:t>29/06/2026</a:t>
             </a:fld>
             <a:endParaRPr lang="pt-BR"/>
           </a:p>
@@ -1226,7 +1226,7 @@
           <a:p>
             <a:fld id="{8DE7C5F4-3E42-4694-80D2-BC3004364726}" type="datetimeFigureOut">
               <a:rPr lang="pt-BR" smtClean="0"/>
-              <a:t>07/10/2025</a:t>
+              <a:t>29/06/2026</a:t>
             </a:fld>
             <a:endParaRPr lang="pt-BR"/>
           </a:p>
@@ -1501,7 +1501,7 @@
           <a:p>
             <a:fld id="{8DE7C5F4-3E42-4694-80D2-BC3004364726}" type="datetimeFigureOut">
               <a:rPr lang="pt-BR" smtClean="0"/>
-              <a:t>07/10/2025</a:t>
+              <a:t>29/06/2026</a:t>
             </a:fld>
             <a:endParaRPr lang="pt-BR"/>
           </a:p>
@@ -1766,7 +1766,7 @@
           <a:p>
             <a:fld id="{8DE7C5F4-3E42-4694-80D2-BC3004364726}" type="datetimeFigureOut">
               <a:rPr lang="pt-BR" smtClean="0"/>
-              <a:t>07/10/2025</a:t>
+              <a:t>29/06/2026</a:t>
             </a:fld>
             <a:endParaRPr lang="pt-BR"/>
           </a:p>
@@ -2178,7 +2178,7 @@
           <a:p>
             <a:fld id="{8DE7C5F4-3E42-4694-80D2-BC3004364726}" type="datetimeFigureOut">
               <a:rPr lang="pt-BR" smtClean="0"/>
-              <a:t>07/10/2025</a:t>
+              <a:t>29/06/2026</a:t>
             </a:fld>
             <a:endParaRPr lang="pt-BR"/>
           </a:p>
@@ -2319,7 +2319,7 @@
           <a:p>
             <a:fld id="{8DE7C5F4-3E42-4694-80D2-BC3004364726}" type="datetimeFigureOut">
               <a:rPr lang="pt-BR" smtClean="0"/>
-              <a:t>07/10/2025</a:t>
+              <a:t>29/06/2026</a:t>
             </a:fld>
             <a:endParaRPr lang="pt-BR"/>
           </a:p>
@@ -2432,7 +2432,7 @@
           <a:p>
             <a:fld id="{8DE7C5F4-3E42-4694-80D2-BC3004364726}" type="datetimeFigureOut">
               <a:rPr lang="pt-BR" smtClean="0"/>
-              <a:t>07/10/2025</a:t>
+              <a:t>29/06/2026</a:t>
             </a:fld>
             <a:endParaRPr lang="pt-BR"/>
           </a:p>
@@ -2743,7 +2743,7 @@
           <a:p>
             <a:fld id="{8DE7C5F4-3E42-4694-80D2-BC3004364726}" type="datetimeFigureOut">
               <a:rPr lang="pt-BR" smtClean="0"/>
-              <a:t>07/10/2025</a:t>
+              <a:t>29/06/2026</a:t>
             </a:fld>
             <a:endParaRPr lang="pt-BR"/>
           </a:p>
@@ -3031,7 +3031,7 @@
           <a:p>
             <a:fld id="{8DE7C5F4-3E42-4694-80D2-BC3004364726}" type="datetimeFigureOut">
               <a:rPr lang="pt-BR" smtClean="0"/>
-              <a:t>07/10/2025</a:t>
+              <a:t>29/06/2026</a:t>
             </a:fld>
             <a:endParaRPr lang="pt-BR"/>
           </a:p>
@@ -3272,7 +3272,7 @@
           <a:p>
             <a:fld id="{8DE7C5F4-3E42-4694-80D2-BC3004364726}" type="datetimeFigureOut">
               <a:rPr lang="pt-BR" smtClean="0"/>
-              <a:t>07/10/2025</a:t>
+              <a:t>29/06/2026</a:t>
             </a:fld>
             <a:endParaRPr lang="pt-BR"/>
           </a:p>
@@ -12186,7 +12186,7 @@
         <p:spPr>
           <a:xfrm>
             <a:off x="1352024" y="2645312"/>
-            <a:ext cx="8193624" cy="0"/>
+            <a:ext cx="9173237" cy="0"/>
           </a:xfrm>
           <a:prstGeom prst="line">
             <a:avLst/>
@@ -28879,7 +28879,7 @@
         <p:spPr>
           <a:xfrm>
             <a:off x="9123483" y="3625832"/>
-            <a:ext cx="1015153" cy="643200"/>
+            <a:ext cx="1015153" cy="488357"/>
           </a:xfrm>
           <a:prstGeom prst="rect">
             <a:avLst/>
@@ -28933,31 +28933,1926 @@
                 <a:cs typeface="Fira Sans Extra Condensed"/>
                 <a:sym typeface="Fira Sans Extra Condensed"/>
               </a:rPr>
-              <a:t>Engineer </a:t>
+              <a:t>Engineer</a:t>
             </a:r>
+            <a:endParaRPr sz="1200" kern="0" dirty="0">
+              <a:solidFill>
+                <a:srgbClr val="000000"/>
+              </a:solidFill>
+              <a:latin typeface="Fira Sans Extra Condensed"/>
+              <a:ea typeface="Fira Sans Extra Condensed"/>
+              <a:cs typeface="Fira Sans Extra Condensed"/>
+              <a:sym typeface="Fira Sans Extra Condensed"/>
+            </a:endParaRPr>
+          </a:p>
+        </p:txBody>
+      </p:sp>
+      <p:sp>
+        <p:nvSpPr>
+          <p:cNvPr id="137" name="Google Shape;1104;p33">
+            <a:extLst>
+              <a:ext uri="{FF2B5EF4-FFF2-40B4-BE49-F238E27FC236}">
+                <a16:creationId xmlns:a16="http://schemas.microsoft.com/office/drawing/2014/main" id="{5C4AFD0C-6A28-4DAB-B4AA-6A7E33162123}"/>
+              </a:ext>
+            </a:extLst>
+          </p:cNvPr>
+          <p:cNvSpPr/>
+          <p:nvPr/>
+        </p:nvSpPr>
+        <p:spPr>
+          <a:xfrm>
+            <a:off x="10486922" y="2735023"/>
+            <a:ext cx="9316" cy="448940"/>
+          </a:xfrm>
+          <a:custGeom>
+            <a:avLst/>
+            <a:gdLst/>
+            <a:ahLst/>
+            <a:cxnLst/>
+            <a:rect l="l" t="t" r="r" b="b"/>
+            <a:pathLst>
+              <a:path w="351" h="16914" extrusionOk="0">
+                <a:moveTo>
+                  <a:pt x="196" y="0"/>
+                </a:moveTo>
+                <a:cubicBezTo>
+                  <a:pt x="126" y="0"/>
+                  <a:pt x="56" y="70"/>
+                  <a:pt x="56" y="154"/>
+                </a:cubicBezTo>
+                <a:lnTo>
+                  <a:pt x="56" y="84"/>
+                </a:lnTo>
+                <a:lnTo>
+                  <a:pt x="56" y="84"/>
+                </a:lnTo>
+                <a:cubicBezTo>
+                  <a:pt x="3" y="177"/>
+                  <a:pt x="76" y="295"/>
+                  <a:pt x="179" y="295"/>
+                </a:cubicBezTo>
+                <a:cubicBezTo>
+                  <a:pt x="185" y="295"/>
+                  <a:pt x="190" y="295"/>
+                  <a:pt x="196" y="294"/>
+                </a:cubicBezTo>
+                <a:cubicBezTo>
+                  <a:pt x="280" y="294"/>
+                  <a:pt x="350" y="224"/>
+                  <a:pt x="350" y="154"/>
+                </a:cubicBezTo>
+                <a:cubicBezTo>
+                  <a:pt x="350" y="70"/>
+                  <a:pt x="280" y="0"/>
+                  <a:pt x="196" y="0"/>
+                </a:cubicBezTo>
+                <a:close/>
+                <a:moveTo>
+                  <a:pt x="196" y="882"/>
+                </a:moveTo>
+                <a:cubicBezTo>
+                  <a:pt x="126" y="882"/>
+                  <a:pt x="56" y="938"/>
+                  <a:pt x="56" y="1022"/>
+                </a:cubicBezTo>
+                <a:lnTo>
+                  <a:pt x="56" y="966"/>
+                </a:lnTo>
+                <a:lnTo>
+                  <a:pt x="56" y="966"/>
+                </a:lnTo>
+                <a:cubicBezTo>
+                  <a:pt x="0" y="1064"/>
+                  <a:pt x="84" y="1176"/>
+                  <a:pt x="196" y="1176"/>
+                </a:cubicBezTo>
+                <a:cubicBezTo>
+                  <a:pt x="280" y="1176"/>
+                  <a:pt x="350" y="1106"/>
+                  <a:pt x="350" y="1022"/>
+                </a:cubicBezTo>
+                <a:cubicBezTo>
+                  <a:pt x="350" y="938"/>
+                  <a:pt x="280" y="882"/>
+                  <a:pt x="196" y="882"/>
+                </a:cubicBezTo>
+                <a:close/>
+                <a:moveTo>
+                  <a:pt x="196" y="1750"/>
+                </a:moveTo>
+                <a:cubicBezTo>
+                  <a:pt x="126" y="1750"/>
+                  <a:pt x="56" y="1820"/>
+                  <a:pt x="56" y="1904"/>
+                </a:cubicBezTo>
+                <a:lnTo>
+                  <a:pt x="56" y="1834"/>
+                </a:lnTo>
+                <a:lnTo>
+                  <a:pt x="56" y="1834"/>
+                </a:lnTo>
+                <a:cubicBezTo>
+                  <a:pt x="17" y="1940"/>
+                  <a:pt x="77" y="2046"/>
+                  <a:pt x="177" y="2046"/>
+                </a:cubicBezTo>
+                <a:cubicBezTo>
+                  <a:pt x="183" y="2046"/>
+                  <a:pt x="190" y="2045"/>
+                  <a:pt x="196" y="2044"/>
+                </a:cubicBezTo>
+                <a:cubicBezTo>
+                  <a:pt x="280" y="2044"/>
+                  <a:pt x="350" y="1974"/>
+                  <a:pt x="350" y="1904"/>
+                </a:cubicBezTo>
+                <a:cubicBezTo>
+                  <a:pt x="350" y="1820"/>
+                  <a:pt x="280" y="1750"/>
+                  <a:pt x="196" y="1750"/>
+                </a:cubicBezTo>
+                <a:close/>
+                <a:moveTo>
+                  <a:pt x="196" y="2632"/>
+                </a:moveTo>
+                <a:cubicBezTo>
+                  <a:pt x="126" y="2632"/>
+                  <a:pt x="56" y="2688"/>
+                  <a:pt x="56" y="2772"/>
+                </a:cubicBezTo>
+                <a:lnTo>
+                  <a:pt x="56" y="2716"/>
+                </a:lnTo>
+                <a:lnTo>
+                  <a:pt x="56" y="2716"/>
+                </a:lnTo>
+                <a:cubicBezTo>
+                  <a:pt x="14" y="2814"/>
+                  <a:pt x="98" y="2926"/>
+                  <a:pt x="196" y="2926"/>
+                </a:cubicBezTo>
+                <a:cubicBezTo>
+                  <a:pt x="280" y="2926"/>
+                  <a:pt x="350" y="2856"/>
+                  <a:pt x="350" y="2772"/>
+                </a:cubicBezTo>
+                <a:cubicBezTo>
+                  <a:pt x="350" y="2688"/>
+                  <a:pt x="280" y="2632"/>
+                  <a:pt x="196" y="2632"/>
+                </a:cubicBezTo>
+                <a:close/>
+                <a:moveTo>
+                  <a:pt x="196" y="3501"/>
+                </a:moveTo>
+                <a:cubicBezTo>
+                  <a:pt x="126" y="3501"/>
+                  <a:pt x="56" y="3571"/>
+                  <a:pt x="56" y="3655"/>
+                </a:cubicBezTo>
+                <a:lnTo>
+                  <a:pt x="56" y="3599"/>
+                </a:lnTo>
+                <a:lnTo>
+                  <a:pt x="56" y="3599"/>
+                </a:lnTo>
+                <a:cubicBezTo>
+                  <a:pt x="17" y="3691"/>
+                  <a:pt x="89" y="3796"/>
+                  <a:pt x="179" y="3796"/>
+                </a:cubicBezTo>
+                <a:cubicBezTo>
+                  <a:pt x="185" y="3796"/>
+                  <a:pt x="191" y="3795"/>
+                  <a:pt x="196" y="3795"/>
+                </a:cubicBezTo>
+                <a:cubicBezTo>
+                  <a:pt x="280" y="3795"/>
+                  <a:pt x="350" y="3725"/>
+                  <a:pt x="350" y="3655"/>
+                </a:cubicBezTo>
+                <a:cubicBezTo>
+                  <a:pt x="350" y="3571"/>
+                  <a:pt x="280" y="3501"/>
+                  <a:pt x="196" y="3501"/>
+                </a:cubicBezTo>
+                <a:close/>
+                <a:moveTo>
+                  <a:pt x="178" y="4381"/>
+                </a:moveTo>
+                <a:cubicBezTo>
+                  <a:pt x="115" y="4381"/>
+                  <a:pt x="56" y="4446"/>
+                  <a:pt x="56" y="4523"/>
+                </a:cubicBezTo>
+                <a:lnTo>
+                  <a:pt x="56" y="4481"/>
+                </a:lnTo>
+                <a:lnTo>
+                  <a:pt x="56" y="4481"/>
+                </a:lnTo>
+                <a:cubicBezTo>
+                  <a:pt x="14" y="4579"/>
+                  <a:pt x="98" y="4677"/>
+                  <a:pt x="196" y="4677"/>
+                </a:cubicBezTo>
+                <a:cubicBezTo>
+                  <a:pt x="280" y="4677"/>
+                  <a:pt x="350" y="4607"/>
+                  <a:pt x="350" y="4523"/>
+                </a:cubicBezTo>
+                <a:cubicBezTo>
+                  <a:pt x="350" y="4439"/>
+                  <a:pt x="280" y="4383"/>
+                  <a:pt x="196" y="4383"/>
+                </a:cubicBezTo>
+                <a:cubicBezTo>
+                  <a:pt x="190" y="4381"/>
+                  <a:pt x="184" y="4381"/>
+                  <a:pt x="178" y="4381"/>
+                </a:cubicBezTo>
+                <a:close/>
+                <a:moveTo>
+                  <a:pt x="196" y="5251"/>
+                </a:moveTo>
+                <a:cubicBezTo>
+                  <a:pt x="126" y="5251"/>
+                  <a:pt x="56" y="5321"/>
+                  <a:pt x="56" y="5405"/>
+                </a:cubicBezTo>
+                <a:lnTo>
+                  <a:pt x="56" y="5349"/>
+                </a:lnTo>
+                <a:lnTo>
+                  <a:pt x="56" y="5349"/>
+                </a:lnTo>
+                <a:cubicBezTo>
+                  <a:pt x="30" y="5441"/>
+                  <a:pt x="90" y="5546"/>
+                  <a:pt x="180" y="5546"/>
+                </a:cubicBezTo>
+                <a:cubicBezTo>
+                  <a:pt x="185" y="5546"/>
+                  <a:pt x="191" y="5545"/>
+                  <a:pt x="196" y="5545"/>
+                </a:cubicBezTo>
+                <a:cubicBezTo>
+                  <a:pt x="280" y="5545"/>
+                  <a:pt x="350" y="5475"/>
+                  <a:pt x="350" y="5405"/>
+                </a:cubicBezTo>
+                <a:cubicBezTo>
+                  <a:pt x="350" y="5321"/>
+                  <a:pt x="280" y="5251"/>
+                  <a:pt x="196" y="5251"/>
+                </a:cubicBezTo>
+                <a:close/>
+                <a:moveTo>
+                  <a:pt x="196" y="6133"/>
+                </a:moveTo>
+                <a:cubicBezTo>
+                  <a:pt x="126" y="6133"/>
+                  <a:pt x="56" y="6189"/>
+                  <a:pt x="56" y="6273"/>
+                </a:cubicBezTo>
+                <a:lnTo>
+                  <a:pt x="56" y="6231"/>
+                </a:lnTo>
+                <a:lnTo>
+                  <a:pt x="56" y="6231"/>
+                </a:lnTo>
+                <a:cubicBezTo>
+                  <a:pt x="28" y="6329"/>
+                  <a:pt x="98" y="6427"/>
+                  <a:pt x="196" y="6427"/>
+                </a:cubicBezTo>
+                <a:cubicBezTo>
+                  <a:pt x="280" y="6427"/>
+                  <a:pt x="350" y="6357"/>
+                  <a:pt x="350" y="6273"/>
+                </a:cubicBezTo>
+                <a:cubicBezTo>
+                  <a:pt x="350" y="6189"/>
+                  <a:pt x="280" y="6133"/>
+                  <a:pt x="196" y="6133"/>
+                </a:cubicBezTo>
+                <a:close/>
+                <a:moveTo>
+                  <a:pt x="196" y="7001"/>
+                </a:moveTo>
+                <a:cubicBezTo>
+                  <a:pt x="126" y="7001"/>
+                  <a:pt x="56" y="7071"/>
+                  <a:pt x="56" y="7155"/>
+                </a:cubicBezTo>
+                <a:lnTo>
+                  <a:pt x="56" y="7113"/>
+                </a:lnTo>
+                <a:lnTo>
+                  <a:pt x="56" y="7113"/>
+                </a:lnTo>
+                <a:cubicBezTo>
+                  <a:pt x="28" y="7211"/>
+                  <a:pt x="98" y="7295"/>
+                  <a:pt x="196" y="7295"/>
+                </a:cubicBezTo>
+                <a:cubicBezTo>
+                  <a:pt x="280" y="7295"/>
+                  <a:pt x="350" y="7225"/>
+                  <a:pt x="350" y="7155"/>
+                </a:cubicBezTo>
+                <a:cubicBezTo>
+                  <a:pt x="350" y="7071"/>
+                  <a:pt x="280" y="7001"/>
+                  <a:pt x="196" y="7001"/>
+                </a:cubicBezTo>
+                <a:close/>
+                <a:moveTo>
+                  <a:pt x="178" y="7881"/>
+                </a:moveTo>
+                <a:cubicBezTo>
+                  <a:pt x="115" y="7881"/>
+                  <a:pt x="56" y="7946"/>
+                  <a:pt x="56" y="8023"/>
+                </a:cubicBezTo>
+                <a:lnTo>
+                  <a:pt x="56" y="7995"/>
+                </a:lnTo>
+                <a:lnTo>
+                  <a:pt x="56" y="7995"/>
+                </a:lnTo>
+                <a:cubicBezTo>
+                  <a:pt x="28" y="8079"/>
+                  <a:pt x="98" y="8177"/>
+                  <a:pt x="196" y="8177"/>
+                </a:cubicBezTo>
+                <a:cubicBezTo>
+                  <a:pt x="280" y="8177"/>
+                  <a:pt x="350" y="8107"/>
+                  <a:pt x="350" y="8023"/>
+                </a:cubicBezTo>
+                <a:cubicBezTo>
+                  <a:pt x="350" y="7939"/>
+                  <a:pt x="280" y="7883"/>
+                  <a:pt x="196" y="7883"/>
+                </a:cubicBezTo>
+                <a:cubicBezTo>
+                  <a:pt x="190" y="7882"/>
+                  <a:pt x="184" y="7881"/>
+                  <a:pt x="178" y="7881"/>
+                </a:cubicBezTo>
+                <a:close/>
+                <a:moveTo>
+                  <a:pt x="196" y="8751"/>
+                </a:moveTo>
+                <a:cubicBezTo>
+                  <a:pt x="126" y="8751"/>
+                  <a:pt x="56" y="8821"/>
+                  <a:pt x="56" y="8905"/>
+                </a:cubicBezTo>
+                <a:lnTo>
+                  <a:pt x="56" y="8863"/>
+                </a:lnTo>
+                <a:lnTo>
+                  <a:pt x="56" y="8863"/>
+                </a:lnTo>
+                <a:cubicBezTo>
+                  <a:pt x="28" y="8961"/>
+                  <a:pt x="112" y="9045"/>
+                  <a:pt x="196" y="9045"/>
+                </a:cubicBezTo>
+                <a:cubicBezTo>
+                  <a:pt x="280" y="9045"/>
+                  <a:pt x="350" y="8975"/>
+                  <a:pt x="350" y="8905"/>
+                </a:cubicBezTo>
+                <a:cubicBezTo>
+                  <a:pt x="350" y="8821"/>
+                  <a:pt x="280" y="8751"/>
+                  <a:pt x="196" y="8751"/>
+                </a:cubicBezTo>
+                <a:close/>
+                <a:moveTo>
+                  <a:pt x="178" y="9631"/>
+                </a:moveTo>
+                <a:cubicBezTo>
+                  <a:pt x="115" y="9631"/>
+                  <a:pt x="56" y="9696"/>
+                  <a:pt x="56" y="9773"/>
+                </a:cubicBezTo>
+                <a:lnTo>
+                  <a:pt x="56" y="9745"/>
+                </a:lnTo>
+                <a:lnTo>
+                  <a:pt x="56" y="9745"/>
+                </a:lnTo>
+                <a:cubicBezTo>
+                  <a:pt x="42" y="9843"/>
+                  <a:pt x="112" y="9927"/>
+                  <a:pt x="196" y="9927"/>
+                </a:cubicBezTo>
+                <a:cubicBezTo>
+                  <a:pt x="280" y="9927"/>
+                  <a:pt x="350" y="9857"/>
+                  <a:pt x="350" y="9773"/>
+                </a:cubicBezTo>
+                <a:cubicBezTo>
+                  <a:pt x="350" y="9689"/>
+                  <a:pt x="280" y="9633"/>
+                  <a:pt x="196" y="9633"/>
+                </a:cubicBezTo>
+                <a:cubicBezTo>
+                  <a:pt x="190" y="9632"/>
+                  <a:pt x="184" y="9631"/>
+                  <a:pt x="178" y="9631"/>
+                </a:cubicBezTo>
+                <a:close/>
+                <a:moveTo>
+                  <a:pt x="196" y="10501"/>
+                </a:moveTo>
+                <a:cubicBezTo>
+                  <a:pt x="126" y="10501"/>
+                  <a:pt x="56" y="10571"/>
+                  <a:pt x="56" y="10655"/>
+                </a:cubicBezTo>
+                <a:lnTo>
+                  <a:pt x="56" y="10627"/>
+                </a:lnTo>
+                <a:lnTo>
+                  <a:pt x="56" y="10627"/>
+                </a:lnTo>
+                <a:cubicBezTo>
+                  <a:pt x="42" y="10711"/>
+                  <a:pt x="112" y="10795"/>
+                  <a:pt x="196" y="10795"/>
+                </a:cubicBezTo>
+                <a:cubicBezTo>
+                  <a:pt x="280" y="10795"/>
+                  <a:pt x="350" y="10725"/>
+                  <a:pt x="350" y="10655"/>
+                </a:cubicBezTo>
+                <a:cubicBezTo>
+                  <a:pt x="350" y="10571"/>
+                  <a:pt x="280" y="10501"/>
+                  <a:pt x="196" y="10501"/>
+                </a:cubicBezTo>
+                <a:close/>
+                <a:moveTo>
+                  <a:pt x="178" y="11381"/>
+                </a:moveTo>
+                <a:cubicBezTo>
+                  <a:pt x="115" y="11381"/>
+                  <a:pt x="56" y="11446"/>
+                  <a:pt x="56" y="11523"/>
+                </a:cubicBezTo>
+                <a:lnTo>
+                  <a:pt x="56" y="11509"/>
+                </a:lnTo>
+                <a:lnTo>
+                  <a:pt x="56" y="11509"/>
+                </a:lnTo>
+                <a:cubicBezTo>
+                  <a:pt x="43" y="11587"/>
+                  <a:pt x="102" y="11665"/>
+                  <a:pt x="178" y="11665"/>
+                </a:cubicBezTo>
+                <a:cubicBezTo>
+                  <a:pt x="184" y="11665"/>
+                  <a:pt x="190" y="11664"/>
+                  <a:pt x="196" y="11663"/>
+                </a:cubicBezTo>
+                <a:cubicBezTo>
+                  <a:pt x="203" y="11664"/>
+                  <a:pt x="211" y="11665"/>
+                  <a:pt x="218" y="11665"/>
+                </a:cubicBezTo>
+                <a:cubicBezTo>
+                  <a:pt x="292" y="11665"/>
+                  <a:pt x="350" y="11600"/>
+                  <a:pt x="350" y="11523"/>
+                </a:cubicBezTo>
+                <a:cubicBezTo>
+                  <a:pt x="350" y="11439"/>
+                  <a:pt x="280" y="11383"/>
+                  <a:pt x="196" y="11383"/>
+                </a:cubicBezTo>
+                <a:cubicBezTo>
+                  <a:pt x="190" y="11382"/>
+                  <a:pt x="184" y="11381"/>
+                  <a:pt x="178" y="11381"/>
+                </a:cubicBezTo>
+                <a:close/>
+                <a:moveTo>
+                  <a:pt x="196" y="12251"/>
+                </a:moveTo>
+                <a:cubicBezTo>
+                  <a:pt x="126" y="12251"/>
+                  <a:pt x="56" y="12321"/>
+                  <a:pt x="56" y="12405"/>
+                </a:cubicBezTo>
+                <a:lnTo>
+                  <a:pt x="56" y="12391"/>
+                </a:lnTo>
+                <a:lnTo>
+                  <a:pt x="56" y="12391"/>
+                </a:lnTo>
+                <a:cubicBezTo>
+                  <a:pt x="42" y="12475"/>
+                  <a:pt x="112" y="12545"/>
+                  <a:pt x="196" y="12545"/>
+                </a:cubicBezTo>
+                <a:cubicBezTo>
+                  <a:pt x="280" y="12545"/>
+                  <a:pt x="350" y="12475"/>
+                  <a:pt x="350" y="12405"/>
+                </a:cubicBezTo>
+                <a:cubicBezTo>
+                  <a:pt x="350" y="12321"/>
+                  <a:pt x="280" y="12251"/>
+                  <a:pt x="196" y="12251"/>
+                </a:cubicBezTo>
+                <a:close/>
+                <a:moveTo>
+                  <a:pt x="196" y="13119"/>
+                </a:moveTo>
+                <a:cubicBezTo>
+                  <a:pt x="126" y="13119"/>
+                  <a:pt x="56" y="13189"/>
+                  <a:pt x="56" y="13273"/>
+                </a:cubicBezTo>
+                <a:lnTo>
+                  <a:pt x="56" y="13259"/>
+                </a:lnTo>
+                <a:lnTo>
+                  <a:pt x="56" y="13259"/>
+                </a:lnTo>
+                <a:cubicBezTo>
+                  <a:pt x="43" y="13337"/>
+                  <a:pt x="102" y="13415"/>
+                  <a:pt x="178" y="13415"/>
+                </a:cubicBezTo>
+                <a:cubicBezTo>
+                  <a:pt x="184" y="13415"/>
+                  <a:pt x="190" y="13414"/>
+                  <a:pt x="196" y="13413"/>
+                </a:cubicBezTo>
+                <a:cubicBezTo>
+                  <a:pt x="280" y="13413"/>
+                  <a:pt x="350" y="13357"/>
+                  <a:pt x="350" y="13273"/>
+                </a:cubicBezTo>
+                <a:cubicBezTo>
+                  <a:pt x="350" y="13189"/>
+                  <a:pt x="280" y="13119"/>
+                  <a:pt x="196" y="13119"/>
+                </a:cubicBezTo>
+                <a:close/>
+                <a:moveTo>
+                  <a:pt x="196" y="14001"/>
+                </a:moveTo>
+                <a:cubicBezTo>
+                  <a:pt x="126" y="14001"/>
+                  <a:pt x="56" y="14071"/>
+                  <a:pt x="56" y="14155"/>
+                </a:cubicBezTo>
+                <a:lnTo>
+                  <a:pt x="56" y="14141"/>
+                </a:lnTo>
+                <a:lnTo>
+                  <a:pt x="56" y="14141"/>
+                </a:lnTo>
+                <a:cubicBezTo>
+                  <a:pt x="42" y="14225"/>
+                  <a:pt x="112" y="14295"/>
+                  <a:pt x="196" y="14295"/>
+                </a:cubicBezTo>
+                <a:cubicBezTo>
+                  <a:pt x="280" y="14295"/>
+                  <a:pt x="350" y="14225"/>
+                  <a:pt x="350" y="14155"/>
+                </a:cubicBezTo>
+                <a:cubicBezTo>
+                  <a:pt x="350" y="14071"/>
+                  <a:pt x="280" y="14001"/>
+                  <a:pt x="196" y="14001"/>
+                </a:cubicBezTo>
+                <a:close/>
+                <a:moveTo>
+                  <a:pt x="196" y="14869"/>
+                </a:moveTo>
+                <a:cubicBezTo>
+                  <a:pt x="126" y="14869"/>
+                  <a:pt x="56" y="14939"/>
+                  <a:pt x="56" y="15023"/>
+                </a:cubicBezTo>
+                <a:lnTo>
+                  <a:pt x="56" y="15009"/>
+                </a:lnTo>
+                <a:lnTo>
+                  <a:pt x="56" y="15009"/>
+                </a:lnTo>
+                <a:cubicBezTo>
+                  <a:pt x="43" y="15087"/>
+                  <a:pt x="102" y="15165"/>
+                  <a:pt x="178" y="15165"/>
+                </a:cubicBezTo>
+                <a:cubicBezTo>
+                  <a:pt x="184" y="15165"/>
+                  <a:pt x="190" y="15165"/>
+                  <a:pt x="196" y="15163"/>
+                </a:cubicBezTo>
+                <a:cubicBezTo>
+                  <a:pt x="280" y="15163"/>
+                  <a:pt x="350" y="15107"/>
+                  <a:pt x="350" y="15023"/>
+                </a:cubicBezTo>
+                <a:cubicBezTo>
+                  <a:pt x="350" y="14939"/>
+                  <a:pt x="280" y="14869"/>
+                  <a:pt x="196" y="14869"/>
+                </a:cubicBezTo>
+                <a:close/>
+                <a:moveTo>
+                  <a:pt x="196" y="15752"/>
+                </a:moveTo>
+                <a:cubicBezTo>
+                  <a:pt x="128" y="15752"/>
+                  <a:pt x="60" y="15818"/>
+                  <a:pt x="56" y="15899"/>
+                </a:cubicBezTo>
+                <a:cubicBezTo>
+                  <a:pt x="56" y="15896"/>
+                  <a:pt x="56" y="15894"/>
+                  <a:pt x="56" y="15892"/>
+                </a:cubicBezTo>
+                <a:lnTo>
+                  <a:pt x="56" y="15906"/>
+                </a:lnTo>
+                <a:cubicBezTo>
+                  <a:pt x="56" y="15903"/>
+                  <a:pt x="56" y="15901"/>
+                  <a:pt x="56" y="15899"/>
+                </a:cubicBezTo>
+                <a:lnTo>
+                  <a:pt x="56" y="15899"/>
+                </a:lnTo>
+                <a:cubicBezTo>
+                  <a:pt x="60" y="15979"/>
+                  <a:pt x="128" y="16046"/>
+                  <a:pt x="196" y="16046"/>
+                </a:cubicBezTo>
+                <a:cubicBezTo>
+                  <a:pt x="280" y="16046"/>
+                  <a:pt x="350" y="15976"/>
+                  <a:pt x="350" y="15906"/>
+                </a:cubicBezTo>
+                <a:cubicBezTo>
+                  <a:pt x="350" y="15822"/>
+                  <a:pt x="280" y="15752"/>
+                  <a:pt x="196" y="15752"/>
+                </a:cubicBezTo>
+                <a:close/>
+                <a:moveTo>
+                  <a:pt x="178" y="16632"/>
+                </a:moveTo>
+                <a:cubicBezTo>
+                  <a:pt x="115" y="16632"/>
+                  <a:pt x="56" y="16697"/>
+                  <a:pt x="56" y="16774"/>
+                </a:cubicBezTo>
+                <a:cubicBezTo>
+                  <a:pt x="56" y="16858"/>
+                  <a:pt x="126" y="16914"/>
+                  <a:pt x="196" y="16914"/>
+                </a:cubicBezTo>
+                <a:cubicBezTo>
+                  <a:pt x="280" y="16914"/>
+                  <a:pt x="350" y="16858"/>
+                  <a:pt x="350" y="16774"/>
+                </a:cubicBezTo>
+                <a:cubicBezTo>
+                  <a:pt x="350" y="16690"/>
+                  <a:pt x="280" y="16634"/>
+                  <a:pt x="196" y="16634"/>
+                </a:cubicBezTo>
+                <a:cubicBezTo>
+                  <a:pt x="190" y="16632"/>
+                  <a:pt x="184" y="16632"/>
+                  <a:pt x="178" y="16632"/>
+                </a:cubicBezTo>
+                <a:close/>
+              </a:path>
+            </a:pathLst>
+          </a:custGeom>
+          <a:solidFill>
+            <a:srgbClr val="303030"/>
+          </a:solidFill>
+          <a:ln>
+            <a:noFill/>
+          </a:ln>
+        </p:spPr>
+        <p:txBody>
+          <a:bodyPr spcFirstLastPara="1" wrap="square" lIns="91425" tIns="91425" rIns="91425" bIns="91425" anchor="ctr" anchorCtr="0">
+            <a:noAutofit/>
+          </a:bodyPr>
+          <a:lstStyle/>
+          <a:p>
+            <a:pPr>
+              <a:buClr>
+                <a:srgbClr val="000000"/>
+              </a:buClr>
+              <a:buFont typeface="Arial"/>
+              <a:buNone/>
+            </a:pPr>
+            <a:endParaRPr sz="1400" kern="0">
+              <a:solidFill>
+                <a:srgbClr val="000000"/>
+              </a:solidFill>
+              <a:latin typeface="Arial"/>
+              <a:cs typeface="Arial"/>
+              <a:sym typeface="Arial"/>
+            </a:endParaRPr>
+          </a:p>
+        </p:txBody>
+      </p:sp>
+      <p:sp>
+        <p:nvSpPr>
+          <p:cNvPr id="139" name="Google Shape;1131;p33">
+            <a:extLst>
+              <a:ext uri="{FF2B5EF4-FFF2-40B4-BE49-F238E27FC236}">
+                <a16:creationId xmlns:a16="http://schemas.microsoft.com/office/drawing/2014/main" id="{67457BCD-B165-4B4D-ADC5-86777E5A7CD5}"/>
+              </a:ext>
+            </a:extLst>
+          </p:cNvPr>
+          <p:cNvSpPr/>
+          <p:nvPr/>
+        </p:nvSpPr>
+        <p:spPr>
+          <a:xfrm>
+            <a:off x="10295896" y="3209182"/>
+            <a:ext cx="422928" cy="406737"/>
+          </a:xfrm>
+          <a:custGeom>
+            <a:avLst/>
+            <a:gdLst/>
+            <a:ahLst/>
+            <a:cxnLst/>
+            <a:rect l="l" t="t" r="r" b="b"/>
+            <a:pathLst>
+              <a:path w="15934" h="15324" extrusionOk="0">
+                <a:moveTo>
+                  <a:pt x="8275" y="1"/>
+                </a:moveTo>
+                <a:cubicBezTo>
+                  <a:pt x="5167" y="1"/>
+                  <a:pt x="2381" y="1863"/>
+                  <a:pt x="1191" y="4733"/>
+                </a:cubicBezTo>
+                <a:cubicBezTo>
+                  <a:pt x="1" y="7590"/>
+                  <a:pt x="659" y="10880"/>
+                  <a:pt x="2857" y="13078"/>
+                </a:cubicBezTo>
+                <a:cubicBezTo>
+                  <a:pt x="4318" y="14548"/>
+                  <a:pt x="6280" y="15323"/>
+                  <a:pt x="8274" y="15323"/>
+                </a:cubicBezTo>
+                <a:cubicBezTo>
+                  <a:pt x="9261" y="15323"/>
+                  <a:pt x="10256" y="15134"/>
+                  <a:pt x="11201" y="14744"/>
+                </a:cubicBezTo>
+                <a:cubicBezTo>
+                  <a:pt x="14072" y="13554"/>
+                  <a:pt x="15934" y="10754"/>
+                  <a:pt x="15934" y="7660"/>
+                </a:cubicBezTo>
+                <a:cubicBezTo>
+                  <a:pt x="15934" y="3431"/>
+                  <a:pt x="12504" y="1"/>
+                  <a:pt x="8275" y="1"/>
+                </a:cubicBezTo>
+                <a:close/>
+              </a:path>
+            </a:pathLst>
+          </a:custGeom>
+          <a:gradFill>
+            <a:gsLst>
+              <a:gs pos="0">
+                <a:srgbClr val="A3D798"/>
+              </a:gs>
+              <a:gs pos="100000">
+                <a:srgbClr val="70C08D"/>
+              </a:gs>
+            </a:gsLst>
+            <a:lin ang="0" scaled="0"/>
+          </a:gradFill>
+          <a:ln>
+            <a:noFill/>
+          </a:ln>
+        </p:spPr>
+        <p:txBody>
+          <a:bodyPr spcFirstLastPara="1" wrap="square" lIns="91425" tIns="91425" rIns="91425" bIns="91425" anchor="ctr" anchorCtr="0">
+            <a:noAutofit/>
+          </a:bodyPr>
+          <a:lstStyle/>
+          <a:p>
+            <a:pPr marL="0" marR="0" lvl="0" indent="0" defTabSz="914400" eaLnBrk="1" fontAlgn="auto" latinLnBrk="0" hangingPunct="1">
+              <a:lnSpc>
+                <a:spcPct val="100000"/>
+              </a:lnSpc>
+              <a:spcBef>
+                <a:spcPts val="0"/>
+              </a:spcBef>
+              <a:spcAft>
+                <a:spcPts val="0"/>
+              </a:spcAft>
+              <a:buClr>
+                <a:srgbClr val="000000"/>
+              </a:buClr>
+              <a:buSzTx/>
+              <a:buFont typeface="Arial"/>
+              <a:buNone/>
+              <a:tabLst/>
+              <a:defRPr/>
+            </a:pPr>
+            <a:endParaRPr kumimoji="0" sz="1400" b="0" i="0" u="none" strike="noStrike" kern="0" cap="none" spc="0" normalizeH="0" baseline="0" noProof="0">
+              <a:ln>
+                <a:noFill/>
+              </a:ln>
+              <a:solidFill>
+                <a:srgbClr val="000000"/>
+              </a:solidFill>
+              <a:effectLst/>
+              <a:uLnTx/>
+              <a:uFillTx/>
+              <a:latin typeface="Arial"/>
+              <a:cs typeface="Arial"/>
+              <a:sym typeface="Arial"/>
+            </a:endParaRPr>
+          </a:p>
+        </p:txBody>
+      </p:sp>
+      <p:sp>
+        <p:nvSpPr>
+          <p:cNvPr id="140" name="Google Shape;1135;p33">
+            <a:extLst>
+              <a:ext uri="{FF2B5EF4-FFF2-40B4-BE49-F238E27FC236}">
+                <a16:creationId xmlns:a16="http://schemas.microsoft.com/office/drawing/2014/main" id="{FD86677C-C14B-4FCA-AD73-290A114F9073}"/>
+              </a:ext>
+            </a:extLst>
+          </p:cNvPr>
+          <p:cNvSpPr/>
+          <p:nvPr/>
+        </p:nvSpPr>
+        <p:spPr>
+          <a:xfrm>
+            <a:off x="10274871" y="3173734"/>
+            <a:ext cx="423000" cy="423000"/>
+          </a:xfrm>
+          <a:prstGeom prst="ellipse">
+            <a:avLst/>
+          </a:prstGeom>
+          <a:noFill/>
+          <a:ln w="9525" cap="flat" cmpd="sng">
+            <a:solidFill>
+              <a:srgbClr val="000000"/>
+            </a:solidFill>
+            <a:prstDash val="solid"/>
+            <a:round/>
+            <a:headEnd type="none" w="sm" len="sm"/>
+            <a:tailEnd type="none" w="sm" len="sm"/>
+          </a:ln>
+        </p:spPr>
+        <p:txBody>
+          <a:bodyPr spcFirstLastPara="1" wrap="square" lIns="91425" tIns="91425" rIns="91425" bIns="91425" anchor="ctr" anchorCtr="0">
+            <a:noAutofit/>
+          </a:bodyPr>
+          <a:lstStyle/>
+          <a:p>
+            <a:pPr marL="0" marR="0" lvl="0" indent="0" defTabSz="914400" eaLnBrk="1" fontAlgn="auto" latinLnBrk="0" hangingPunct="1">
+              <a:lnSpc>
+                <a:spcPct val="100000"/>
+              </a:lnSpc>
+              <a:spcBef>
+                <a:spcPts val="0"/>
+              </a:spcBef>
+              <a:spcAft>
+                <a:spcPts val="0"/>
+              </a:spcAft>
+              <a:buClr>
+                <a:srgbClr val="000000"/>
+              </a:buClr>
+              <a:buSzTx/>
+              <a:buFont typeface="Arial"/>
+              <a:buNone/>
+              <a:tabLst/>
+              <a:defRPr/>
+            </a:pPr>
+            <a:endParaRPr kumimoji="0" sz="1400" b="0" i="0" u="none" strike="noStrike" kern="0" cap="none" spc="0" normalizeH="0" baseline="0" noProof="0">
+              <a:ln>
+                <a:noFill/>
+              </a:ln>
+              <a:solidFill>
+                <a:srgbClr val="000000"/>
+              </a:solidFill>
+              <a:effectLst/>
+              <a:uLnTx/>
+              <a:uFillTx/>
+              <a:latin typeface="Arial"/>
+              <a:cs typeface="Arial"/>
+              <a:sym typeface="Arial"/>
+            </a:endParaRPr>
+          </a:p>
+        </p:txBody>
+      </p:sp>
+      <p:sp>
+        <p:nvSpPr>
+          <p:cNvPr id="141" name="Google Shape;1112;p33">
+            <a:extLst>
+              <a:ext uri="{FF2B5EF4-FFF2-40B4-BE49-F238E27FC236}">
+                <a16:creationId xmlns:a16="http://schemas.microsoft.com/office/drawing/2014/main" id="{8334B3FA-6A08-4125-9D71-EB15098A7919}"/>
+              </a:ext>
+            </a:extLst>
+          </p:cNvPr>
+          <p:cNvSpPr/>
+          <p:nvPr/>
+        </p:nvSpPr>
+        <p:spPr>
+          <a:xfrm>
+            <a:off x="10392511" y="2553658"/>
+            <a:ext cx="213349" cy="182904"/>
+          </a:xfrm>
+          <a:custGeom>
+            <a:avLst/>
+            <a:gdLst/>
+            <a:ahLst/>
+            <a:cxnLst/>
+            <a:rect l="l" t="t" r="r" b="b"/>
+            <a:pathLst>
+              <a:path w="8038" h="6891" extrusionOk="0">
+                <a:moveTo>
+                  <a:pt x="4607" y="1"/>
+                </a:moveTo>
+                <a:cubicBezTo>
+                  <a:pt x="1541" y="1"/>
+                  <a:pt x="1" y="3711"/>
+                  <a:pt x="2171" y="5881"/>
+                </a:cubicBezTo>
+                <a:cubicBezTo>
+                  <a:pt x="2872" y="6578"/>
+                  <a:pt x="3733" y="6890"/>
+                  <a:pt x="4577" y="6890"/>
+                </a:cubicBezTo>
+                <a:cubicBezTo>
+                  <a:pt x="6344" y="6890"/>
+                  <a:pt x="8038" y="5520"/>
+                  <a:pt x="8038" y="3445"/>
+                </a:cubicBezTo>
+                <a:cubicBezTo>
+                  <a:pt x="8038" y="1541"/>
+                  <a:pt x="6497" y="1"/>
+                  <a:pt x="4607" y="1"/>
+                </a:cubicBezTo>
+                <a:close/>
+              </a:path>
+            </a:pathLst>
+          </a:custGeom>
+          <a:gradFill>
+            <a:gsLst>
+              <a:gs pos="0">
+                <a:srgbClr val="A3D798"/>
+              </a:gs>
+              <a:gs pos="100000">
+                <a:srgbClr val="70C08D"/>
+              </a:gs>
+            </a:gsLst>
+            <a:lin ang="0" scaled="0"/>
+          </a:gradFill>
+          <a:ln>
+            <a:noFill/>
+          </a:ln>
+        </p:spPr>
+        <p:txBody>
+          <a:bodyPr spcFirstLastPara="1" wrap="square" lIns="91425" tIns="91425" rIns="91425" bIns="91425" anchor="ctr" anchorCtr="0">
+            <a:noAutofit/>
+          </a:bodyPr>
+          <a:lstStyle/>
+          <a:p>
+            <a:pPr marL="0" marR="0" lvl="0" indent="0" defTabSz="914400" eaLnBrk="1" fontAlgn="auto" latinLnBrk="0" hangingPunct="1">
+              <a:lnSpc>
+                <a:spcPct val="100000"/>
+              </a:lnSpc>
+              <a:spcBef>
+                <a:spcPts val="0"/>
+              </a:spcBef>
+              <a:spcAft>
+                <a:spcPts val="0"/>
+              </a:spcAft>
+              <a:buClr>
+                <a:srgbClr val="000000"/>
+              </a:buClr>
+              <a:buSzTx/>
+              <a:buFont typeface="Arial"/>
+              <a:buNone/>
+              <a:tabLst/>
+              <a:defRPr/>
+            </a:pPr>
             <a:r>
-              <a:rPr lang="pt-BR" sz="800" kern="0" dirty="0">
+              <a:rPr kumimoji="0" lang="en" sz="1400" b="0" i="0" u="none" strike="noStrike" kern="0" cap="none" spc="0" normalizeH="0" baseline="0" noProof="0">
+                <a:ln>
+                  <a:noFill/>
+                </a:ln>
                 <a:solidFill>
                   <a:srgbClr val="000000"/>
                 </a:solidFill>
-                <a:latin typeface="Fira Sans Extra Condensed"/>
-                <a:ea typeface="Fira Sans Extra Condensed"/>
-                <a:cs typeface="Fira Sans Extra Condensed"/>
-                <a:sym typeface="Fira Sans Extra Condensed"/>
+                <a:effectLst/>
+                <a:uLnTx/>
+                <a:uFillTx/>
+                <a:latin typeface="Arial"/>
+                <a:cs typeface="Arial"/>
+                <a:sym typeface="Arial"/>
               </a:rPr>
-              <a:t>Associate</a:t>
+              <a:t>  </a:t>
             </a:r>
+            <a:endParaRPr kumimoji="0" sz="1400" b="0" i="0" u="none" strike="noStrike" kern="0" cap="none" spc="0" normalizeH="0" baseline="0" noProof="0">
+              <a:ln>
+                <a:noFill/>
+              </a:ln>
+              <a:solidFill>
+                <a:srgbClr val="000000"/>
+              </a:solidFill>
+              <a:effectLst/>
+              <a:uLnTx/>
+              <a:uFillTx/>
+              <a:latin typeface="Arial"/>
+              <a:cs typeface="Arial"/>
+              <a:sym typeface="Arial"/>
+            </a:endParaRPr>
+          </a:p>
+        </p:txBody>
+      </p:sp>
+      <p:sp>
+        <p:nvSpPr>
+          <p:cNvPr id="142" name="Google Shape;1113;p33">
+            <a:extLst>
+              <a:ext uri="{FF2B5EF4-FFF2-40B4-BE49-F238E27FC236}">
+                <a16:creationId xmlns:a16="http://schemas.microsoft.com/office/drawing/2014/main" id="{267A8A41-8880-4A37-8E05-70EB43711A65}"/>
+              </a:ext>
+            </a:extLst>
+          </p:cNvPr>
+          <p:cNvSpPr/>
+          <p:nvPr/>
+        </p:nvSpPr>
+        <p:spPr>
+          <a:xfrm>
+            <a:off x="10365013" y="2527142"/>
+            <a:ext cx="222638" cy="190814"/>
+          </a:xfrm>
+          <a:custGeom>
+            <a:avLst/>
+            <a:gdLst/>
+            <a:ahLst/>
+            <a:cxnLst/>
+            <a:rect l="l" t="t" r="r" b="b"/>
+            <a:pathLst>
+              <a:path w="8388" h="7189" extrusionOk="0">
+                <a:moveTo>
+                  <a:pt x="4803" y="300"/>
+                </a:moveTo>
+                <a:cubicBezTo>
+                  <a:pt x="6609" y="314"/>
+                  <a:pt x="8079" y="1770"/>
+                  <a:pt x="8093" y="3590"/>
+                </a:cubicBezTo>
+                <a:cubicBezTo>
+                  <a:pt x="8093" y="5580"/>
+                  <a:pt x="6470" y="6897"/>
+                  <a:pt x="4774" y="6897"/>
+                </a:cubicBezTo>
+                <a:cubicBezTo>
+                  <a:pt x="3965" y="6897"/>
+                  <a:pt x="3139" y="6597"/>
+                  <a:pt x="2465" y="5928"/>
+                </a:cubicBezTo>
+                <a:cubicBezTo>
+                  <a:pt x="393" y="3856"/>
+                  <a:pt x="1863" y="300"/>
+                  <a:pt x="4803" y="300"/>
+                </a:cubicBezTo>
+                <a:close/>
+                <a:moveTo>
+                  <a:pt x="4762" y="1"/>
+                </a:moveTo>
+                <a:cubicBezTo>
+                  <a:pt x="3881" y="1"/>
+                  <a:pt x="2984" y="327"/>
+                  <a:pt x="2255" y="1056"/>
+                </a:cubicBezTo>
+                <a:cubicBezTo>
+                  <a:pt x="1" y="3324"/>
+                  <a:pt x="1597" y="7188"/>
+                  <a:pt x="4803" y="7188"/>
+                </a:cubicBezTo>
+                <a:cubicBezTo>
+                  <a:pt x="6777" y="7174"/>
+                  <a:pt x="8387" y="5578"/>
+                  <a:pt x="8387" y="3590"/>
+                </a:cubicBezTo>
+                <a:cubicBezTo>
+                  <a:pt x="8378" y="1430"/>
+                  <a:pt x="6606" y="1"/>
+                  <a:pt x="4762" y="1"/>
+                </a:cubicBezTo>
+                <a:close/>
+              </a:path>
+            </a:pathLst>
+          </a:custGeom>
+          <a:solidFill>
+            <a:srgbClr val="303030"/>
+          </a:solidFill>
+          <a:ln>
+            <a:noFill/>
+          </a:ln>
+        </p:spPr>
+        <p:txBody>
+          <a:bodyPr spcFirstLastPara="1" wrap="square" lIns="91425" tIns="91425" rIns="91425" bIns="91425" anchor="ctr" anchorCtr="0">
+            <a:noAutofit/>
+          </a:bodyPr>
+          <a:lstStyle/>
+          <a:p>
+            <a:pPr>
+              <a:buClr>
+                <a:srgbClr val="000000"/>
+              </a:buClr>
+              <a:buFont typeface="Arial"/>
+              <a:buNone/>
+            </a:pPr>
+            <a:endParaRPr sz="1400" kern="0">
+              <a:solidFill>
+                <a:srgbClr val="000000"/>
+              </a:solidFill>
+              <a:latin typeface="Arial"/>
+              <a:cs typeface="Arial"/>
+              <a:sym typeface="Arial"/>
+            </a:endParaRPr>
+          </a:p>
+        </p:txBody>
+      </p:sp>
+      <p:sp>
+        <p:nvSpPr>
+          <p:cNvPr id="143" name="Google Shape;1558;p38">
+            <a:extLst>
+              <a:ext uri="{FF2B5EF4-FFF2-40B4-BE49-F238E27FC236}">
+                <a16:creationId xmlns:a16="http://schemas.microsoft.com/office/drawing/2014/main" id="{DC9194EF-AAE2-4866-BFA8-349371940CD0}"/>
+              </a:ext>
+            </a:extLst>
+          </p:cNvPr>
+          <p:cNvSpPr/>
+          <p:nvPr/>
+        </p:nvSpPr>
+        <p:spPr>
+          <a:xfrm>
+            <a:off x="10388523" y="3283278"/>
+            <a:ext cx="195693" cy="216472"/>
+          </a:xfrm>
+          <a:custGeom>
+            <a:avLst/>
+            <a:gdLst/>
+            <a:ahLst/>
+            <a:cxnLst/>
+            <a:rect l="l" t="t" r="r" b="b"/>
+            <a:pathLst>
+              <a:path w="11059" h="12666" extrusionOk="0">
+                <a:moveTo>
+                  <a:pt x="4285" y="789"/>
+                </a:moveTo>
+                <a:cubicBezTo>
+                  <a:pt x="4758" y="789"/>
+                  <a:pt x="5136" y="1135"/>
+                  <a:pt x="5136" y="1608"/>
+                </a:cubicBezTo>
+                <a:lnTo>
+                  <a:pt x="5136" y="4128"/>
+                </a:lnTo>
+                <a:cubicBezTo>
+                  <a:pt x="4190" y="4317"/>
+                  <a:pt x="3466" y="5168"/>
+                  <a:pt x="3466" y="6144"/>
+                </a:cubicBezTo>
+                <a:cubicBezTo>
+                  <a:pt x="3466" y="6365"/>
+                  <a:pt x="3655" y="6585"/>
+                  <a:pt x="3907" y="6585"/>
+                </a:cubicBezTo>
+                <a:cubicBezTo>
+                  <a:pt x="4127" y="6585"/>
+                  <a:pt x="4285" y="6365"/>
+                  <a:pt x="4285" y="6144"/>
+                </a:cubicBezTo>
+                <a:cubicBezTo>
+                  <a:pt x="4285" y="5577"/>
+                  <a:pt x="4663" y="5168"/>
+                  <a:pt x="5136" y="4947"/>
+                </a:cubicBezTo>
+                <a:lnTo>
+                  <a:pt x="5136" y="8192"/>
+                </a:lnTo>
+                <a:cubicBezTo>
+                  <a:pt x="5136" y="8665"/>
+                  <a:pt x="4758" y="9011"/>
+                  <a:pt x="4285" y="9011"/>
+                </a:cubicBezTo>
+                <a:cubicBezTo>
+                  <a:pt x="3938" y="9011"/>
+                  <a:pt x="3592" y="8791"/>
+                  <a:pt x="3497" y="8381"/>
+                </a:cubicBezTo>
+                <a:cubicBezTo>
+                  <a:pt x="3434" y="8318"/>
+                  <a:pt x="3277" y="8192"/>
+                  <a:pt x="3119" y="8192"/>
+                </a:cubicBezTo>
+                <a:cubicBezTo>
+                  <a:pt x="2962" y="8192"/>
+                  <a:pt x="2899" y="8255"/>
+                  <a:pt x="2647" y="8255"/>
+                </a:cubicBezTo>
+                <a:cubicBezTo>
+                  <a:pt x="1544" y="8255"/>
+                  <a:pt x="1544" y="6617"/>
+                  <a:pt x="2647" y="6617"/>
+                </a:cubicBezTo>
+                <a:cubicBezTo>
+                  <a:pt x="2867" y="6617"/>
+                  <a:pt x="3025" y="6428"/>
+                  <a:pt x="3025" y="6176"/>
+                </a:cubicBezTo>
+                <a:cubicBezTo>
+                  <a:pt x="3025" y="5955"/>
+                  <a:pt x="2836" y="5735"/>
+                  <a:pt x="2647" y="5735"/>
+                </a:cubicBezTo>
+                <a:cubicBezTo>
+                  <a:pt x="2080" y="5735"/>
+                  <a:pt x="1607" y="6018"/>
+                  <a:pt x="1292" y="6428"/>
+                </a:cubicBezTo>
+                <a:cubicBezTo>
+                  <a:pt x="1103" y="6270"/>
+                  <a:pt x="977" y="6018"/>
+                  <a:pt x="977" y="5735"/>
+                </a:cubicBezTo>
+                <a:cubicBezTo>
+                  <a:pt x="977" y="5483"/>
+                  <a:pt x="1103" y="5325"/>
+                  <a:pt x="1166" y="5199"/>
+                </a:cubicBezTo>
+                <a:cubicBezTo>
+                  <a:pt x="1323" y="5042"/>
+                  <a:pt x="1323" y="4790"/>
+                  <a:pt x="1166" y="4632"/>
+                </a:cubicBezTo>
+                <a:cubicBezTo>
+                  <a:pt x="662" y="4097"/>
+                  <a:pt x="1103" y="3277"/>
+                  <a:pt x="1828" y="3277"/>
+                </a:cubicBezTo>
+                <a:cubicBezTo>
+                  <a:pt x="2048" y="3277"/>
+                  <a:pt x="2237" y="3340"/>
+                  <a:pt x="2395" y="3498"/>
+                </a:cubicBezTo>
+                <a:cubicBezTo>
+                  <a:pt x="2473" y="3577"/>
+                  <a:pt x="2584" y="3616"/>
+                  <a:pt x="2694" y="3616"/>
+                </a:cubicBezTo>
+                <a:cubicBezTo>
+                  <a:pt x="2804" y="3616"/>
+                  <a:pt x="2914" y="3577"/>
+                  <a:pt x="2993" y="3498"/>
+                </a:cubicBezTo>
+                <a:cubicBezTo>
+                  <a:pt x="3151" y="3340"/>
+                  <a:pt x="3151" y="3057"/>
+                  <a:pt x="2993" y="2899"/>
+                </a:cubicBezTo>
+                <a:cubicBezTo>
+                  <a:pt x="2678" y="2584"/>
+                  <a:pt x="2269" y="2427"/>
+                  <a:pt x="1828" y="2427"/>
+                </a:cubicBezTo>
+                <a:cubicBezTo>
+                  <a:pt x="1828" y="1954"/>
+                  <a:pt x="2174" y="1608"/>
+                  <a:pt x="2647" y="1608"/>
+                </a:cubicBezTo>
+                <a:cubicBezTo>
+                  <a:pt x="2773" y="1608"/>
+                  <a:pt x="2836" y="1639"/>
+                  <a:pt x="2962" y="1702"/>
+                </a:cubicBezTo>
+                <a:cubicBezTo>
+                  <a:pt x="3000" y="1713"/>
+                  <a:pt x="3040" y="1718"/>
+                  <a:pt x="3079" y="1718"/>
+                </a:cubicBezTo>
+                <a:cubicBezTo>
+                  <a:pt x="3264" y="1718"/>
+                  <a:pt x="3445" y="1601"/>
+                  <a:pt x="3497" y="1419"/>
+                </a:cubicBezTo>
+                <a:cubicBezTo>
+                  <a:pt x="3592" y="1072"/>
+                  <a:pt x="3938" y="789"/>
+                  <a:pt x="4285" y="789"/>
+                </a:cubicBezTo>
+                <a:close/>
+                <a:moveTo>
+                  <a:pt x="6711" y="915"/>
+                </a:moveTo>
+                <a:cubicBezTo>
+                  <a:pt x="7057" y="915"/>
+                  <a:pt x="7404" y="1135"/>
+                  <a:pt x="7498" y="1545"/>
+                </a:cubicBezTo>
+                <a:cubicBezTo>
+                  <a:pt x="7547" y="1715"/>
+                  <a:pt x="7708" y="1828"/>
+                  <a:pt x="7880" y="1828"/>
+                </a:cubicBezTo>
+                <a:cubicBezTo>
+                  <a:pt x="7931" y="1828"/>
+                  <a:pt x="7983" y="1818"/>
+                  <a:pt x="8034" y="1797"/>
+                </a:cubicBezTo>
+                <a:cubicBezTo>
+                  <a:pt x="8160" y="1765"/>
+                  <a:pt x="8223" y="1734"/>
+                  <a:pt x="8349" y="1734"/>
+                </a:cubicBezTo>
+                <a:cubicBezTo>
+                  <a:pt x="8822" y="1734"/>
+                  <a:pt x="9168" y="2080"/>
+                  <a:pt x="9168" y="2553"/>
+                </a:cubicBezTo>
+                <a:cubicBezTo>
+                  <a:pt x="8759" y="2553"/>
+                  <a:pt x="8318" y="2710"/>
+                  <a:pt x="8003" y="3025"/>
+                </a:cubicBezTo>
+                <a:cubicBezTo>
+                  <a:pt x="7845" y="3183"/>
+                  <a:pt x="7845" y="3467"/>
+                  <a:pt x="8003" y="3624"/>
+                </a:cubicBezTo>
+                <a:cubicBezTo>
+                  <a:pt x="8081" y="3703"/>
+                  <a:pt x="8192" y="3742"/>
+                  <a:pt x="8302" y="3742"/>
+                </a:cubicBezTo>
+                <a:cubicBezTo>
+                  <a:pt x="8412" y="3742"/>
+                  <a:pt x="8522" y="3703"/>
+                  <a:pt x="8601" y="3624"/>
+                </a:cubicBezTo>
+                <a:cubicBezTo>
+                  <a:pt x="8759" y="3467"/>
+                  <a:pt x="8948" y="3372"/>
+                  <a:pt x="9168" y="3372"/>
+                </a:cubicBezTo>
+                <a:cubicBezTo>
+                  <a:pt x="9893" y="3372"/>
+                  <a:pt x="10271" y="4191"/>
+                  <a:pt x="9798" y="4758"/>
+                </a:cubicBezTo>
+                <a:cubicBezTo>
+                  <a:pt x="9735" y="4853"/>
+                  <a:pt x="9735" y="5073"/>
+                  <a:pt x="9830" y="5231"/>
+                </a:cubicBezTo>
+                <a:cubicBezTo>
+                  <a:pt x="9956" y="5357"/>
+                  <a:pt x="10050" y="5514"/>
+                  <a:pt x="10050" y="5798"/>
+                </a:cubicBezTo>
+                <a:cubicBezTo>
+                  <a:pt x="10050" y="6050"/>
+                  <a:pt x="9924" y="6302"/>
+                  <a:pt x="9735" y="6459"/>
+                </a:cubicBezTo>
+                <a:cubicBezTo>
+                  <a:pt x="9420" y="6050"/>
+                  <a:pt x="8948" y="5798"/>
+                  <a:pt x="8381" y="5798"/>
+                </a:cubicBezTo>
+                <a:cubicBezTo>
+                  <a:pt x="8160" y="5798"/>
+                  <a:pt x="8003" y="5987"/>
+                  <a:pt x="8003" y="6207"/>
+                </a:cubicBezTo>
+                <a:cubicBezTo>
+                  <a:pt x="8003" y="6459"/>
+                  <a:pt x="8192" y="6648"/>
+                  <a:pt x="8381" y="6648"/>
+                </a:cubicBezTo>
+                <a:cubicBezTo>
+                  <a:pt x="9483" y="6648"/>
+                  <a:pt x="9483" y="8318"/>
+                  <a:pt x="8381" y="8318"/>
+                </a:cubicBezTo>
+                <a:cubicBezTo>
+                  <a:pt x="8255" y="8318"/>
+                  <a:pt x="8192" y="8255"/>
+                  <a:pt x="8066" y="8224"/>
+                </a:cubicBezTo>
+                <a:cubicBezTo>
+                  <a:pt x="8021" y="8211"/>
+                  <a:pt x="7976" y="8205"/>
+                  <a:pt x="7931" y="8205"/>
+                </a:cubicBezTo>
+                <a:cubicBezTo>
+                  <a:pt x="7752" y="8205"/>
+                  <a:pt x="7580" y="8306"/>
+                  <a:pt x="7530" y="8507"/>
+                </a:cubicBezTo>
+                <a:cubicBezTo>
+                  <a:pt x="7435" y="8854"/>
+                  <a:pt x="7089" y="9137"/>
+                  <a:pt x="6742" y="9137"/>
+                </a:cubicBezTo>
+                <a:cubicBezTo>
+                  <a:pt x="6270" y="9137"/>
+                  <a:pt x="5892" y="8759"/>
+                  <a:pt x="5892" y="8318"/>
+                </a:cubicBezTo>
+                <a:lnTo>
+                  <a:pt x="5892" y="5073"/>
+                </a:lnTo>
+                <a:cubicBezTo>
+                  <a:pt x="6364" y="5231"/>
+                  <a:pt x="6742" y="5703"/>
+                  <a:pt x="6742" y="6270"/>
+                </a:cubicBezTo>
+                <a:cubicBezTo>
+                  <a:pt x="6742" y="6491"/>
+                  <a:pt x="6931" y="6680"/>
+                  <a:pt x="7120" y="6680"/>
+                </a:cubicBezTo>
+                <a:cubicBezTo>
+                  <a:pt x="7341" y="6680"/>
+                  <a:pt x="7530" y="6491"/>
+                  <a:pt x="7530" y="6270"/>
+                </a:cubicBezTo>
+                <a:cubicBezTo>
+                  <a:pt x="7530" y="5262"/>
+                  <a:pt x="6805" y="4412"/>
+                  <a:pt x="5860" y="4254"/>
+                </a:cubicBezTo>
+                <a:lnTo>
+                  <a:pt x="5860" y="1734"/>
+                </a:lnTo>
+                <a:cubicBezTo>
+                  <a:pt x="5860" y="1261"/>
+                  <a:pt x="6207" y="915"/>
+                  <a:pt x="6711" y="915"/>
+                </a:cubicBezTo>
+                <a:close/>
+                <a:moveTo>
+                  <a:pt x="5514" y="9358"/>
+                </a:moveTo>
+                <a:cubicBezTo>
+                  <a:pt x="5829" y="9736"/>
+                  <a:pt x="6270" y="9925"/>
+                  <a:pt x="6774" y="9925"/>
+                </a:cubicBezTo>
+                <a:lnTo>
+                  <a:pt x="6774" y="10209"/>
+                </a:lnTo>
+                <a:lnTo>
+                  <a:pt x="4285" y="10209"/>
+                </a:lnTo>
+                <a:lnTo>
+                  <a:pt x="4285" y="9925"/>
+                </a:lnTo>
+                <a:cubicBezTo>
+                  <a:pt x="4789" y="9925"/>
+                  <a:pt x="5230" y="9673"/>
+                  <a:pt x="5514" y="9358"/>
+                </a:cubicBezTo>
+                <a:close/>
+                <a:moveTo>
+                  <a:pt x="6648" y="11028"/>
+                </a:moveTo>
+                <a:cubicBezTo>
+                  <a:pt x="6522" y="11500"/>
+                  <a:pt x="6049" y="11847"/>
+                  <a:pt x="5514" y="11847"/>
+                </a:cubicBezTo>
+                <a:cubicBezTo>
+                  <a:pt x="4978" y="11847"/>
+                  <a:pt x="4537" y="11500"/>
+                  <a:pt x="4316" y="11028"/>
+                </a:cubicBezTo>
+                <a:close/>
+                <a:moveTo>
+                  <a:pt x="4285" y="1"/>
+                </a:moveTo>
+                <a:cubicBezTo>
+                  <a:pt x="3686" y="1"/>
+                  <a:pt x="3151" y="316"/>
+                  <a:pt x="2867" y="820"/>
+                </a:cubicBezTo>
+                <a:cubicBezTo>
+                  <a:pt x="2796" y="811"/>
+                  <a:pt x="2724" y="806"/>
+                  <a:pt x="2654" y="806"/>
+                </a:cubicBezTo>
+                <a:cubicBezTo>
+                  <a:pt x="1762" y="806"/>
+                  <a:pt x="977" y="1526"/>
+                  <a:pt x="977" y="2490"/>
+                </a:cubicBezTo>
+                <a:lnTo>
+                  <a:pt x="977" y="2679"/>
+                </a:lnTo>
+                <a:cubicBezTo>
+                  <a:pt x="851" y="2742"/>
+                  <a:pt x="756" y="2836"/>
+                  <a:pt x="630" y="2962"/>
+                </a:cubicBezTo>
+                <a:cubicBezTo>
+                  <a:pt x="63" y="3498"/>
+                  <a:pt x="0" y="4286"/>
+                  <a:pt x="347" y="4947"/>
+                </a:cubicBezTo>
+                <a:cubicBezTo>
+                  <a:pt x="189" y="5199"/>
+                  <a:pt x="126" y="5514"/>
+                  <a:pt x="126" y="5766"/>
+                </a:cubicBezTo>
+                <a:cubicBezTo>
+                  <a:pt x="126" y="6365"/>
+                  <a:pt x="441" y="6932"/>
+                  <a:pt x="945" y="7184"/>
+                </a:cubicBezTo>
+                <a:cubicBezTo>
+                  <a:pt x="819" y="8192"/>
+                  <a:pt x="1576" y="9043"/>
+                  <a:pt x="2584" y="9043"/>
+                </a:cubicBezTo>
+                <a:lnTo>
+                  <a:pt x="2836" y="9043"/>
+                </a:lnTo>
+                <a:cubicBezTo>
+                  <a:pt x="2993" y="9326"/>
+                  <a:pt x="3182" y="9515"/>
+                  <a:pt x="3434" y="9673"/>
+                </a:cubicBezTo>
+                <a:lnTo>
+                  <a:pt x="3434" y="10587"/>
+                </a:lnTo>
+                <a:cubicBezTo>
+                  <a:pt x="3434" y="11721"/>
+                  <a:pt x="4379" y="12666"/>
+                  <a:pt x="5514" y="12666"/>
+                </a:cubicBezTo>
+                <a:cubicBezTo>
+                  <a:pt x="6648" y="12666"/>
+                  <a:pt x="7593" y="11721"/>
+                  <a:pt x="7593" y="10587"/>
+                </a:cubicBezTo>
+                <a:lnTo>
+                  <a:pt x="7593" y="9673"/>
+                </a:lnTo>
+                <a:cubicBezTo>
+                  <a:pt x="7845" y="9515"/>
+                  <a:pt x="8066" y="9326"/>
+                  <a:pt x="8192" y="9043"/>
+                </a:cubicBezTo>
+                <a:lnTo>
+                  <a:pt x="8444" y="9043"/>
+                </a:lnTo>
+                <a:cubicBezTo>
+                  <a:pt x="9420" y="9043"/>
+                  <a:pt x="10208" y="8129"/>
+                  <a:pt x="10082" y="7153"/>
+                </a:cubicBezTo>
+                <a:cubicBezTo>
+                  <a:pt x="10586" y="6869"/>
+                  <a:pt x="10901" y="6333"/>
+                  <a:pt x="10901" y="5735"/>
+                </a:cubicBezTo>
+                <a:cubicBezTo>
+                  <a:pt x="10901" y="5451"/>
+                  <a:pt x="10838" y="5136"/>
+                  <a:pt x="10680" y="4916"/>
+                </a:cubicBezTo>
+                <a:cubicBezTo>
+                  <a:pt x="11059" y="4317"/>
+                  <a:pt x="10933" y="3498"/>
+                  <a:pt x="10428" y="2962"/>
+                </a:cubicBezTo>
+                <a:cubicBezTo>
+                  <a:pt x="10302" y="2836"/>
+                  <a:pt x="10208" y="2742"/>
+                  <a:pt x="10082" y="2679"/>
+                </a:cubicBezTo>
+                <a:lnTo>
+                  <a:pt x="10082" y="2490"/>
+                </a:lnTo>
+                <a:cubicBezTo>
+                  <a:pt x="10082" y="1576"/>
+                  <a:pt x="9326" y="820"/>
+                  <a:pt x="8444" y="820"/>
+                </a:cubicBezTo>
+                <a:lnTo>
+                  <a:pt x="8192" y="820"/>
+                </a:lnTo>
+                <a:cubicBezTo>
+                  <a:pt x="7908" y="316"/>
+                  <a:pt x="7372" y="1"/>
+                  <a:pt x="6774" y="1"/>
+                </a:cubicBezTo>
+                <a:cubicBezTo>
+                  <a:pt x="6270" y="1"/>
+                  <a:pt x="5829" y="222"/>
+                  <a:pt x="5514" y="537"/>
+                </a:cubicBezTo>
+                <a:cubicBezTo>
+                  <a:pt x="5199" y="190"/>
+                  <a:pt x="4758" y="1"/>
+                  <a:pt x="4285" y="1"/>
+                </a:cubicBezTo>
+                <a:close/>
+              </a:path>
+            </a:pathLst>
+          </a:custGeom>
+          <a:solidFill>
+            <a:srgbClr val="FFFFFF"/>
+          </a:solidFill>
+          <a:ln w="3175">
+            <a:solidFill>
+              <a:srgbClr val="FFFFFF"/>
+            </a:solidFill>
+          </a:ln>
+        </p:spPr>
+        <p:txBody>
+          <a:bodyPr spcFirstLastPara="1" wrap="square" lIns="91425" tIns="91425" rIns="91425" bIns="91425" anchor="ctr" anchorCtr="0">
+            <a:noAutofit/>
+          </a:bodyPr>
+          <a:lstStyle/>
+          <a:p>
+            <a:pPr marL="0" marR="0" lvl="0" indent="0" defTabSz="914400" eaLnBrk="1" fontAlgn="auto" latinLnBrk="0" hangingPunct="1">
+              <a:lnSpc>
+                <a:spcPct val="100000"/>
+              </a:lnSpc>
+              <a:spcBef>
+                <a:spcPts val="0"/>
+              </a:spcBef>
+              <a:spcAft>
+                <a:spcPts val="0"/>
+              </a:spcAft>
+              <a:buClr>
+                <a:srgbClr val="000000"/>
+              </a:buClr>
+              <a:buSzTx/>
+              <a:buFont typeface="Arial"/>
+              <a:buNone/>
+              <a:tabLst/>
+              <a:defRPr/>
+            </a:pPr>
+            <a:endParaRPr kumimoji="0" sz="1400" b="0" i="0" u="none" strike="noStrike" kern="0" cap="none" spc="0" normalizeH="0" baseline="0" noProof="0">
+              <a:ln>
+                <a:noFill/>
+              </a:ln>
+              <a:solidFill>
+                <a:srgbClr val="000000"/>
+              </a:solidFill>
+              <a:effectLst/>
+              <a:uLnTx/>
+              <a:uFillTx/>
+              <a:latin typeface="Arial"/>
+              <a:cs typeface="Arial"/>
+              <a:sym typeface="Arial"/>
+            </a:endParaRPr>
+          </a:p>
+        </p:txBody>
+      </p:sp>
+      <p:sp>
+        <p:nvSpPr>
+          <p:cNvPr id="144" name="Google Shape;1173;p33">
+            <a:extLst>
+              <a:ext uri="{FF2B5EF4-FFF2-40B4-BE49-F238E27FC236}">
+                <a16:creationId xmlns:a16="http://schemas.microsoft.com/office/drawing/2014/main" id="{2C71C861-0B11-4DE4-9AAA-A27387F2CBED}"/>
+              </a:ext>
+            </a:extLst>
+          </p:cNvPr>
+          <p:cNvSpPr/>
+          <p:nvPr/>
+        </p:nvSpPr>
+        <p:spPr>
+          <a:xfrm rot="10800000">
+            <a:off x="9993834" y="2877445"/>
+            <a:ext cx="459027" cy="250117"/>
+          </a:xfrm>
+          <a:custGeom>
+            <a:avLst/>
+            <a:gdLst/>
+            <a:ahLst/>
+            <a:cxnLst/>
+            <a:rect l="l" t="t" r="r" b="b"/>
+            <a:pathLst>
+              <a:path w="24139" h="8290" extrusionOk="0">
+                <a:moveTo>
+                  <a:pt x="23845" y="295"/>
+                </a:moveTo>
+                <a:lnTo>
+                  <a:pt x="23845" y="7995"/>
+                </a:lnTo>
+                <a:lnTo>
+                  <a:pt x="3445" y="7995"/>
+                </a:lnTo>
+                <a:lnTo>
+                  <a:pt x="3445" y="5783"/>
+                </a:lnTo>
+                <a:lnTo>
+                  <a:pt x="603" y="4145"/>
+                </a:lnTo>
+                <a:lnTo>
+                  <a:pt x="3445" y="2507"/>
+                </a:lnTo>
+                <a:lnTo>
+                  <a:pt x="3445" y="295"/>
+                </a:lnTo>
+                <a:close/>
+                <a:moveTo>
+                  <a:pt x="3151" y="1"/>
+                </a:moveTo>
+                <a:lnTo>
+                  <a:pt x="3151" y="2339"/>
+                </a:lnTo>
+                <a:lnTo>
+                  <a:pt x="1" y="4145"/>
+                </a:lnTo>
+                <a:lnTo>
+                  <a:pt x="3151" y="5951"/>
+                </a:lnTo>
+                <a:lnTo>
+                  <a:pt x="3151" y="8289"/>
+                </a:lnTo>
+                <a:lnTo>
+                  <a:pt x="24139" y="8289"/>
+                </a:lnTo>
+                <a:lnTo>
+                  <a:pt x="24139" y="1"/>
+                </a:lnTo>
+                <a:close/>
+              </a:path>
+            </a:pathLst>
+          </a:custGeom>
+          <a:solidFill>
+            <a:srgbClr val="303030"/>
+          </a:solidFill>
+          <a:ln>
+            <a:noFill/>
+          </a:ln>
+        </p:spPr>
+        <p:txBody>
+          <a:bodyPr spcFirstLastPara="1" wrap="square" lIns="91425" tIns="91425" rIns="91425" bIns="91425" anchor="ctr" anchorCtr="0">
+            <a:noAutofit/>
+          </a:bodyPr>
+          <a:lstStyle/>
+          <a:p>
+            <a:pPr>
+              <a:buClr>
+                <a:srgbClr val="000000"/>
+              </a:buClr>
+              <a:buFont typeface="Arial"/>
+              <a:buNone/>
+            </a:pPr>
+            <a:endParaRPr sz="1400" kern="0">
+              <a:solidFill>
+                <a:srgbClr val="000000"/>
+              </a:solidFill>
+              <a:latin typeface="Arial"/>
+              <a:cs typeface="Arial"/>
+              <a:sym typeface="Arial"/>
+            </a:endParaRPr>
+          </a:p>
+        </p:txBody>
+      </p:sp>
+      <p:sp>
+        <p:nvSpPr>
+          <p:cNvPr id="145" name="Google Shape;1178;p33">
+            <a:extLst>
+              <a:ext uri="{FF2B5EF4-FFF2-40B4-BE49-F238E27FC236}">
+                <a16:creationId xmlns:a16="http://schemas.microsoft.com/office/drawing/2014/main" id="{C8AE2A51-C904-4292-B963-FED09AF057F5}"/>
+              </a:ext>
+            </a:extLst>
+          </p:cNvPr>
+          <p:cNvSpPr txBox="1"/>
+          <p:nvPr/>
+        </p:nvSpPr>
+        <p:spPr>
+          <a:xfrm>
+            <a:off x="9953343" y="2950141"/>
+            <a:ext cx="476668" cy="119690"/>
+          </a:xfrm>
+          <a:prstGeom prst="rect">
+            <a:avLst/>
+          </a:prstGeom>
+          <a:noFill/>
+          <a:ln>
+            <a:noFill/>
+          </a:ln>
+        </p:spPr>
+        <p:txBody>
+          <a:bodyPr spcFirstLastPara="1" wrap="square" lIns="91425" tIns="91425" rIns="91425" bIns="91425" anchor="ctr" anchorCtr="0">
+            <a:noAutofit/>
+          </a:bodyPr>
+          <a:lstStyle/>
+          <a:p>
+            <a:pPr algn="ctr">
+              <a:buClr>
+                <a:srgbClr val="000000"/>
+              </a:buClr>
+              <a:buFont typeface="Arial"/>
+              <a:buNone/>
+            </a:pPr>
             <a:r>
-              <a:rPr lang="pt-BR" sz="1200" kern="0" dirty="0">
+              <a:rPr lang="en" sz="1100" kern="0" dirty="0">
                 <a:solidFill>
-                  <a:srgbClr val="000000"/>
+                  <a:srgbClr val="A3D798"/>
                 </a:solidFill>
-                <a:latin typeface="Fira Sans Extra Condensed"/>
-                <a:ea typeface="Fira Sans Extra Condensed"/>
-                <a:cs typeface="Fira Sans Extra Condensed"/>
-                <a:sym typeface="Fira Sans Extra Condensed"/>
+                <a:latin typeface="Fira Sans Extra Condensed Medium"/>
+                <a:ea typeface="Fira Sans Extra Condensed Medium"/>
+                <a:cs typeface="Fira Sans Extra Condensed Medium"/>
+                <a:sym typeface="Fira Sans Extra Condensed Medium"/>
               </a:rPr>
-              <a:t> </a:t>
+              <a:t>2026</a:t>
+            </a:r>
+            <a:endParaRPr sz="1100" kern="0" dirty="0">
+              <a:solidFill>
+                <a:srgbClr val="A3D798"/>
+              </a:solidFill>
+              <a:latin typeface="Fira Sans Extra Condensed Medium"/>
+              <a:ea typeface="Fira Sans Extra Condensed Medium"/>
+              <a:cs typeface="Fira Sans Extra Condensed Medium"/>
+              <a:sym typeface="Fira Sans Extra Condensed Medium"/>
+            </a:endParaRPr>
+          </a:p>
+        </p:txBody>
+      </p:sp>
+      <p:sp>
+        <p:nvSpPr>
+          <p:cNvPr id="146" name="Google Shape;1171;p33">
+            <a:extLst>
+              <a:ext uri="{FF2B5EF4-FFF2-40B4-BE49-F238E27FC236}">
+                <a16:creationId xmlns:a16="http://schemas.microsoft.com/office/drawing/2014/main" id="{6A4B6F9A-2CD1-4594-8571-24CEEECF6FB6}"/>
+              </a:ext>
+            </a:extLst>
+          </p:cNvPr>
+          <p:cNvSpPr txBox="1"/>
+          <p:nvPr/>
+        </p:nvSpPr>
+        <p:spPr>
+          <a:xfrm>
+            <a:off x="9999783" y="3625831"/>
+            <a:ext cx="1015153" cy="643201"/>
+          </a:xfrm>
+          <a:prstGeom prst="rect">
+            <a:avLst/>
+          </a:prstGeom>
+          <a:noFill/>
+          <a:ln>
+            <a:noFill/>
+          </a:ln>
+        </p:spPr>
+        <p:txBody>
+          <a:bodyPr spcFirstLastPara="1" wrap="square" lIns="91425" tIns="91425" rIns="91425" bIns="91425" anchor="b" anchorCtr="0">
+            <a:noAutofit/>
+          </a:bodyPr>
+          <a:lstStyle/>
+          <a:p>
+            <a:pPr algn="ctr">
+              <a:buClr>
+                <a:srgbClr val="000000"/>
+              </a:buClr>
+              <a:buFont typeface="Arial"/>
+              <a:buNone/>
+            </a:pPr>
+            <a:r>
+              <a:rPr lang="pt-BR" sz="1200" b="0" i="0" dirty="0">
+                <a:solidFill>
+                  <a:srgbClr val="222222"/>
+                </a:solidFill>
+                <a:effectLst/>
+                <a:latin typeface="Amazon Ember Display"/>
+              </a:rPr>
+              <a:t>AWS Certified AI Practitioner</a:t>
             </a:r>
             <a:endParaRPr sz="1200" kern="0" dirty="0">
               <a:solidFill>
